--- a/presentation/dist/qubit_pitch.pptx
+++ b/presentation/dist/qubit_pitch.pptx
@@ -6418,7 +6418,7 @@
                 </a:solidFill>
                 <a:latin typeface="Arial"/>
               </a:rPr>
-              <a:t>5.84 → 2.05</a:t>
+              <a:t>5.84 → 2.03</a:t>
             </a:r>
           </a:p>
         </p:txBody>
@@ -7296,7 +7296,7 @@
                 </a:solidFill>
                 <a:latin typeface="Arial"/>
               </a:rPr>
-              <a:t>28 qubits synthesized on Classiq to depth 96 with 162 two-qubit gates, executed on the simulator. CVaR falls from 47.1 to 11.8, so the optimizer is learning.</a:t>
+              <a:t>28 qubits synthesized on Classiq to depth 75 with 150 two-qubit gates, executed on the simulator. The CVaR of sampled H falls by 18.5 (-20.3 to -38.7; the per-link fit drops constant terms, so H is not positive), meaning the optimizer is learning.</a:t>
             </a:r>
           </a:p>
         </p:txBody>
@@ -8213,7 +8213,7 @@
                 </a:solidFill>
                 <a:latin typeface="Arial"/>
               </a:rPr>
-              <a:t>44 tests, one of them exhaustive</a:t>
+              <a:t>49 tests, one of them exhaustive</a:t>
             </a:r>
           </a:p>
         </p:txBody>
@@ -8798,7 +8798,7 @@
                 </a:solidFill>
                 <a:latin typeface="Arial"/>
               </a:rPr>
-              <a:t>Φ* 5.8 → 2.1</a:t>
+              <a:t>Φ* 5.8 → 2.0</a:t>
             </a:r>
           </a:p>
         </p:txBody>
@@ -9047,7 +9047,7 @@
                 </a:solidFill>
                 <a:latin typeface="Arial"/>
               </a:rPr>
-              <a:t>44 tests</a:t>
+              <a:t>49 tests</a:t>
             </a:r>
           </a:p>
         </p:txBody>
